--- a/ppt/RAG08-Loader-Splitter.pptx
+++ b/ppt/RAG08-Loader-Splitter.pptx
@@ -5871,12 +5871,8 @@
           <a:p>
             <a:pPr lvl="1"/>
             <a:r>
-              <a:rPr lang="fr-FR" dirty="0" err="1"/>
-              <a:t>D"étection</a:t>
-            </a:r>
-            <a:r>
               <a:rPr lang="fr-FR" dirty="0"/>
-              <a:t> du type de fichier automatique</a:t>
+              <a:t>Détection du type de fichier automatique</a:t>
             </a:r>
           </a:p>
           <a:p>
